--- a/data/deep_dives/carteira_fidc_solis_kedu_2101f61c/exports/documentary_comparison.pptx
+++ b/data/deep_dives/carteira_fidc_solis_kedu_2101f61c/exports/documentary_comparison.pptx
@@ -4281,7 +4281,7 @@
                       <a:r>
                         <a:rPr sz="1300" b="1">
                           <a:solidFill>
-                            <a:srgbClr val="1F1F1F"/>
+                            <a:srgbClr val="FFFFFF"/>
                           </a:solidFill>
                           <a:latin typeface="Calibri"/>
                         </a:rPr>
@@ -4291,7 +4291,7 @@
                   </a:txBody>
                   <a:tcPr marL="91440" marR="91440" marT="41148" marB="41148" anchor="ctr">
                     <a:solidFill>
-                      <a:srgbClr val="EC7000"/>
+                      <a:srgbClr val="FF6200"/>
                     </a:solidFill>
                     <a:lnL>
                       <a:noFill/>
@@ -4330,7 +4330,7 @@
                       <a:r>
                         <a:rPr sz="1300" b="1">
                           <a:solidFill>
-                            <a:srgbClr val="1F1F1F"/>
+                            <a:srgbClr val="FFFFFF"/>
                           </a:solidFill>
                           <a:latin typeface="Calibri"/>
                         </a:rPr>
@@ -4340,7 +4340,7 @@
                   </a:txBody>
                   <a:tcPr marL="91440" marR="91440" marT="41148" marB="41148" anchor="ctr">
                     <a:solidFill>
-                      <a:srgbClr val="EC7000"/>
+                      <a:srgbClr val="FF6200"/>
                     </a:solidFill>
                     <a:lnL>
                       <a:noFill/>
@@ -4720,7 +4720,7 @@
                           </a:solidFill>
                           <a:latin typeface="Calibri"/>
                         </a:rPr>
-                        <a:t>Não localizado nas fontes acessíveis desta leitura</a:t>
+                        <a:t>-</a:t>
                       </a:r>
                     </a:p>
                   </a:txBody>
@@ -4816,7 +4816,7 @@
                           </a:solidFill>
                           <a:latin typeface="Calibri"/>
                         </a:rPr>
-                        <a:t>Não localizado nas fontes acessíveis desta leitura</a:t>
+                        <a:t>-</a:t>
                       </a:r>
                     </a:p>
                   </a:txBody>
@@ -5140,7 +5140,7 @@
                       <a:r>
                         <a:rPr sz="1300" b="1">
                           <a:solidFill>
-                            <a:srgbClr val="1F1F1F"/>
+                            <a:srgbClr val="FFFFFF"/>
                           </a:solidFill>
                           <a:latin typeface="Calibri"/>
                         </a:rPr>
@@ -5150,7 +5150,7 @@
                   </a:txBody>
                   <a:tcPr marL="91440" marR="91440" marT="41148" marB="41148" anchor="ctr">
                     <a:solidFill>
-                      <a:srgbClr val="EC7000"/>
+                      <a:srgbClr val="FF6200"/>
                     </a:solidFill>
                     <a:lnL>
                       <a:noFill/>
@@ -5189,7 +5189,7 @@
                       <a:r>
                         <a:rPr sz="1300" b="1">
                           <a:solidFill>
-                            <a:srgbClr val="1F1F1F"/>
+                            <a:srgbClr val="FFFFFF"/>
                           </a:solidFill>
                           <a:latin typeface="Calibri"/>
                         </a:rPr>
@@ -5199,7 +5199,7 @@
                   </a:txBody>
                   <a:tcPr marL="91440" marR="91440" marT="41148" marB="41148" anchor="ctr">
                     <a:solidFill>
-                      <a:srgbClr val="EC7000"/>
+                      <a:srgbClr val="FF6200"/>
                     </a:solidFill>
                     <a:lnL>
                       <a:noFill/>
@@ -5409,7 +5409,7 @@
                           </a:solidFill>
                           <a:latin typeface="Calibri"/>
                         </a:rPr>
-                        <a:t>Não localizado nas fontes acessíveis desta leitura</a:t>
+                        <a:t>-</a:t>
                       </a:r>
                     </a:p>
                   </a:txBody>
@@ -5505,7 +5505,7 @@
                           </a:solidFill>
                           <a:latin typeface="Calibri"/>
                         </a:rPr>
-                        <a:t>Não localizado nas fontes acessíveis desta leitura</a:t>
+                        <a:t>-</a:t>
                       </a:r>
                     </a:p>
                   </a:txBody>
@@ -5699,7 +5699,7 @@
                           </a:solidFill>
                           <a:latin typeface="Calibri"/>
                         </a:rPr>
-                        <a:t>Não localizado nas fontes acessíveis desta leitura</a:t>
+                        <a:t>-</a:t>
                       </a:r>
                     </a:p>
                   </a:txBody>
@@ -5903,7 +5903,7 @@
                       <a:r>
                         <a:rPr sz="1300" b="1">
                           <a:solidFill>
-                            <a:srgbClr val="1F1F1F"/>
+                            <a:srgbClr val="FFFFFF"/>
                           </a:solidFill>
                           <a:latin typeface="Calibri"/>
                         </a:rPr>
@@ -5913,7 +5913,7 @@
                   </a:txBody>
                   <a:tcPr marL="91440" marR="91440" marT="41148" marB="41148" anchor="ctr">
                     <a:solidFill>
-                      <a:srgbClr val="EC7000"/>
+                      <a:srgbClr val="FF6200"/>
                     </a:solidFill>
                     <a:lnL>
                       <a:noFill/>
@@ -5952,7 +5952,7 @@
                       <a:r>
                         <a:rPr sz="1300" b="1">
                           <a:solidFill>
-                            <a:srgbClr val="1F1F1F"/>
+                            <a:srgbClr val="FFFFFF"/>
                           </a:solidFill>
                           <a:latin typeface="Calibri"/>
                         </a:rPr>
@@ -5962,7 +5962,7 @@
                   </a:txBody>
                   <a:tcPr marL="91440" marR="91440" marT="41148" marB="41148" anchor="ctr">
                     <a:solidFill>
-                      <a:srgbClr val="EC7000"/>
+                      <a:srgbClr val="FF6200"/>
                     </a:solidFill>
                     <a:lnL>
                       <a:noFill/>
@@ -6536,7 +6536,7 @@
                           </a:solidFill>
                           <a:latin typeface="Calibri"/>
                         </a:rPr>
-                        <a:t>Não localizado nas fontes acessíveis desta leitura</a:t>
+                        <a:t>-</a:t>
                       </a:r>
                     </a:p>
                   </a:txBody>
@@ -6740,7 +6740,7 @@
                       <a:r>
                         <a:rPr sz="1300" b="1">
                           <a:solidFill>
-                            <a:srgbClr val="1F1F1F"/>
+                            <a:srgbClr val="FFFFFF"/>
                           </a:solidFill>
                           <a:latin typeface="Calibri"/>
                         </a:rPr>
@@ -6750,7 +6750,7 @@
                   </a:txBody>
                   <a:tcPr marL="91440" marR="91440" marT="41148" marB="41148" anchor="ctr">
                     <a:solidFill>
-                      <a:srgbClr val="EC7000"/>
+                      <a:srgbClr val="FF6200"/>
                     </a:solidFill>
                     <a:lnL>
                       <a:noFill/>
@@ -6789,7 +6789,7 @@
                       <a:r>
                         <a:rPr sz="1300" b="1">
                           <a:solidFill>
-                            <a:srgbClr val="1F1F1F"/>
+                            <a:srgbClr val="FFFFFF"/>
                           </a:solidFill>
                           <a:latin typeface="Calibri"/>
                         </a:rPr>
@@ -6799,7 +6799,7 @@
                   </a:txBody>
                   <a:tcPr marL="91440" marR="91440" marT="41148" marB="41148" anchor="ctr">
                     <a:solidFill>
-                      <a:srgbClr val="EC7000"/>
+                      <a:srgbClr val="FF6200"/>
                     </a:solidFill>
                     <a:lnL>
                       <a:noFill/>
@@ -7385,7 +7385,7 @@
                       <a:r>
                         <a:rPr sz="1300" b="1">
                           <a:solidFill>
-                            <a:srgbClr val="1F1F1F"/>
+                            <a:srgbClr val="FFFFFF"/>
                           </a:solidFill>
                           <a:latin typeface="Calibri"/>
                         </a:rPr>
@@ -7395,7 +7395,7 @@
                   </a:txBody>
                   <a:tcPr marL="91440" marR="91440" marT="41148" marB="41148" anchor="ctr">
                     <a:solidFill>
-                      <a:srgbClr val="EC7000"/>
+                      <a:srgbClr val="FF6200"/>
                     </a:solidFill>
                     <a:lnL>
                       <a:noFill/>
@@ -7434,7 +7434,7 @@
                       <a:r>
                         <a:rPr sz="1300" b="1">
                           <a:solidFill>
-                            <a:srgbClr val="1F1F1F"/>
+                            <a:srgbClr val="FFFFFF"/>
                           </a:solidFill>
                           <a:latin typeface="Calibri"/>
                         </a:rPr>
@@ -7444,7 +7444,7 @@
                   </a:txBody>
                   <a:tcPr marL="91440" marR="91440" marT="41148" marB="41148" anchor="ctr">
                     <a:solidFill>
-                      <a:srgbClr val="EC7000"/>
+                      <a:srgbClr val="FF6200"/>
                     </a:solidFill>
                     <a:lnL>
                       <a:noFill/>
@@ -7956,7 +7956,7 @@
                       <a:r>
                         <a:rPr sz="1300" b="1">
                           <a:solidFill>
-                            <a:srgbClr val="1F1F1F"/>
+                            <a:srgbClr val="FFFFFF"/>
                           </a:solidFill>
                           <a:latin typeface="Calibri"/>
                         </a:rPr>
@@ -7966,7 +7966,7 @@
                   </a:txBody>
                   <a:tcPr marL="91440" marR="91440" marT="41148" marB="41148" anchor="ctr">
                     <a:solidFill>
-                      <a:srgbClr val="EC7000"/>
+                      <a:srgbClr val="FF6200"/>
                     </a:solidFill>
                     <a:lnL>
                       <a:noFill/>
@@ -8005,7 +8005,7 @@
                       <a:r>
                         <a:rPr sz="1300" b="1">
                           <a:solidFill>
-                            <a:srgbClr val="1F1F1F"/>
+                            <a:srgbClr val="FFFFFF"/>
                           </a:solidFill>
                           <a:latin typeface="Calibri"/>
                         </a:rPr>
@@ -8015,7 +8015,7 @@
                   </a:txBody>
                   <a:tcPr marL="91440" marR="91440" marT="41148" marB="41148" anchor="ctr">
                     <a:solidFill>
-                      <a:srgbClr val="EC7000"/>
+                      <a:srgbClr val="FF6200"/>
                     </a:solidFill>
                     <a:lnL>
                       <a:noFill/>
@@ -8527,7 +8527,7 @@
                       <a:r>
                         <a:rPr sz="1300" b="1">
                           <a:solidFill>
-                            <a:srgbClr val="1F1F1F"/>
+                            <a:srgbClr val="FFFFFF"/>
                           </a:solidFill>
                           <a:latin typeface="Calibri"/>
                         </a:rPr>
@@ -8537,7 +8537,7 @@
                   </a:txBody>
                   <a:tcPr marL="91440" marR="91440" marT="41148" marB="41148" anchor="ctr">
                     <a:solidFill>
-                      <a:srgbClr val="EC7000"/>
+                      <a:srgbClr val="FF6200"/>
                     </a:solidFill>
                     <a:lnL>
                       <a:noFill/>
@@ -8576,7 +8576,7 @@
                       <a:r>
                         <a:rPr sz="1300" b="1">
                           <a:solidFill>
-                            <a:srgbClr val="1F1F1F"/>
+                            <a:srgbClr val="FFFFFF"/>
                           </a:solidFill>
                           <a:latin typeface="Calibri"/>
                         </a:rPr>
@@ -8586,7 +8586,7 @@
                   </a:txBody>
                   <a:tcPr marL="91440" marR="91440" marT="41148" marB="41148" anchor="ctr">
                     <a:solidFill>
-                      <a:srgbClr val="EC7000"/>
+                      <a:srgbClr val="FF6200"/>
                     </a:solidFill>
                     <a:lnL>
                       <a:noFill/>
@@ -8700,29 +8700,7 @@
                           </a:solidFill>
                           <a:latin typeface="Calibri"/>
                         </a:rPr>
-                        <a:t>Direitos creditórios / PL e cotas subordinadas / PL; validar ativo elegível, subclasses e fórmula</a:t>
-                      </a:r>
-                    </a:p>
-                    <a:p>
-                      <a:pPr algn="ctr">
-                        <a:lnSpc>
-                          <a:spcPct val="100000"/>
-                        </a:lnSpc>
-                        <a:spcBef>
-                          <a:spcPts val="0"/>
-                        </a:spcBef>
-                        <a:spcAft>
-                          <a:spcPts val="0"/>
-                        </a:spcAft>
-                      </a:pPr>
-                      <a:r>
-                        <a:rPr sz="1300" b="0">
-                          <a:solidFill>
-                            <a:srgbClr val="1F1F1F"/>
-                          </a:solidFill>
-                          <a:latin typeface="Calibri"/>
-                        </a:rPr>
-                        <a:t>contratual</a:t>
+                        <a:t>Direitos creditórios / PL e cotas subordinadas / PL</a:t>
                       </a:r>
                     </a:p>
                   </a:txBody>
@@ -9056,7 +9034,7 @@
                           </a:solidFill>
                           <a:latin typeface="Calibri"/>
                         </a:rPr>
-                        <a:t>Sem competência IME carregada em cache local</a:t>
+                        <a:t>-</a:t>
                       </a:r>
                     </a:p>
                   </a:txBody>
